--- a/prezentacje/PL/ContentAI_Security.pptx
+++ b/prezentacje/PL/ContentAI_Security.pptx
@@ -2877,7 +2877,7 @@
                 <a:ea typeface="Arial" pitchFamily="34" charset="-122"/>
                 <a:cs typeface="Arial" pitchFamily="34" charset="-120"/>
               </a:rPr>
-              <a:t>Brak 2FA</a:t>
+              <a:t>2FA tylko z bramą</a:t>
             </a:r>
             <a:endParaRPr lang="en-US" sz="1150" dirty="0"/>
           </a:p>
@@ -2916,7 +2916,7 @@
                 <a:ea typeface="Arial" pitchFamily="34" charset="-122"/>
                 <a:cs typeface="Arial" pitchFamily="34" charset="-120"/>
               </a:rPr>
-              <a:t>Logowanie opiera się na haśle. Rekomendacja: hasła z menedżera, minimum 16 znaków.</a:t>
+              <a:t>Własne logowanie to samo hasło. Drugi składnik daje brama uwierzytelniająca postawiona przed całością.</a:t>
             </a:r>
             <a:endParaRPr lang="en-US" sz="950" dirty="0"/>
           </a:p>
@@ -2982,7 +2982,7 @@
                 <a:ea typeface="Arial" pitchFamily="34" charset="-122"/>
                 <a:cs typeface="Arial" pitchFamily="34" charset="-120"/>
               </a:rPr>
-              <a:t>Sesje w pamięci</a:t>
+              <a:t>Brak resetu przez e-mail</a:t>
             </a:r>
             <a:endParaRPr lang="en-US" sz="1150" dirty="0"/>
           </a:p>
@@ -3021,7 +3021,7 @@
                 <a:ea typeface="Arial" pitchFamily="34" charset="-122"/>
                 <a:cs typeface="Arial" pitchFamily="34" charset="-120"/>
               </a:rPr>
-              <a:t>Każdy restart usługi, w tym aktualizacja, wylogowuje wszystkich.</a:t>
+              <a:t>Hasło zmienia administrator poleceniem — nie ma samoobsługi.</a:t>
             </a:r>
             <a:endParaRPr lang="en-US" sz="950" dirty="0"/>
           </a:p>
@@ -3192,7 +3192,7 @@
                 <a:ea typeface="Arial" pitchFamily="34" charset="-122"/>
                 <a:cs typeface="Arial" pitchFamily="34" charset="-120"/>
               </a:rPr>
-              <a:t>Brak resetu hasła</a:t>
+              <a:t>Zaufanie do X-Forwarded-For</a:t>
             </a:r>
             <a:endParaRPr lang="en-US" sz="1150" dirty="0"/>
           </a:p>
@@ -3231,7 +3231,7 @@
                 <a:ea typeface="Arial" pitchFamily="34" charset="-122"/>
                 <a:cs typeface="Arial" pitchFamily="34" charset="-120"/>
               </a:rPr>
-              <a:t>Hasło zmienia administrator poleceniem — nie ma samoobsługi przez e-mail.</a:t>
+              <a:t>Serwer ufa temu nagłówkowi, więc ma sens wyłącznie za własnym Caddy.</a:t>
             </a:r>
             <a:endParaRPr lang="en-US" sz="950" dirty="0"/>
           </a:p>
@@ -3297,7 +3297,7 @@
                 <a:ea typeface="Arial" pitchFamily="34" charset="-122"/>
                 <a:cs typeface="Arial" pitchFamily="34" charset="-120"/>
               </a:rPr>
-              <a:t>Zaufanie do X-Forwarded-For</a:t>
+              <a:t>Port tylko lokalnie</a:t>
             </a:r>
             <a:endParaRPr lang="en-US" sz="1150" dirty="0"/>
           </a:p>
@@ -3336,7 +3336,7 @@
                 <a:ea typeface="Arial" pitchFamily="34" charset="-122"/>
                 <a:cs typeface="Arial" pitchFamily="34" charset="-120"/>
               </a:rPr>
-              <a:t>Serwer ufa temu nagłówkowi, więc ma sens wyłącznie za własnym Caddy.</a:t>
+              <a:t>Przy bramie port 3100 nie może być wystawiony — nagłówek tożsamości byłby wtedy do podrobienia.</a:t>
             </a:r>
             <a:endParaRPr lang="en-US" sz="950" dirty="0"/>
           </a:p>
@@ -7829,7 +7829,7 @@
                 <a:ea typeface="Cambria" pitchFamily="34" charset="-122"/>
                 <a:cs typeface="Cambria" pitchFamily="34" charset="-120"/>
               </a:rPr>
-              <a:t>Cookie HttpOnly</a:t>
+              <a:t>Podpisane ciasteczko</a:t>
             </a:r>
             <a:endParaRPr lang="en-US" sz="1500" dirty="0"/>
           </a:p>
@@ -7868,7 +7868,7 @@
                 <a:ea typeface="Arial" pitchFamily="34" charset="-122"/>
                 <a:cs typeface="Arial" pitchFamily="34" charset="-120"/>
               </a:rPr>
-              <a:t>Token sesji niedostępny dla JavaScriptu, SameSite=Lax, Secure przy HTTPS.</a:t>
+              <a:t>HMAC-SHA256 z sekretu serwera. HttpOnly, SameSite=Lax, Secure przy HTTPS. Podmiana psuje podpis.</a:t>
             </a:r>
             <a:endParaRPr lang="en-US" sz="1000" dirty="0"/>
           </a:p>
@@ -7934,7 +7934,7 @@
                 <a:ea typeface="Arial" pitchFamily="34" charset="-122"/>
                 <a:cs typeface="Arial" pitchFamily="34" charset="-120"/>
               </a:rPr>
-              <a:t>Sesje żyją w pamięci procesu — restart usługi wylogowuje wszystkich. To świadomy wybór: zero zależności, a ponowne logowanie kosztuje kilka sekund.</a:t>
+              <a:t>Sesja siedzi w podpisanym ciasteczku, nie w pamięci procesu, więc restart usługi nie wylogowuje zespołu. Cztery drogi unieważnienia działają bez restartu: usunięcie konta, zmiana hasła, zmiana roli i wylogowanie.</a:t>
             </a:r>
             <a:endParaRPr lang="en-US" sz="1050" dirty="0"/>
           </a:p>

--- a/prezentacje/PL/ContentAI_Security.pptx
+++ b/prezentacje/PL/ContentAI_Security.pptx
@@ -2811,7 +2811,7 @@
                 <a:ea typeface="Arial" pitchFamily="34" charset="-122"/>
                 <a:cs typeface="Arial" pitchFamily="34" charset="-120"/>
               </a:rPr>
-              <a:t>Czego ten model nie obejmuje — świadomie.</a:t>
+              <a:t>Czego ten model nie obejmuje - świadomie.</a:t>
             </a:r>
             <a:endParaRPr lang="en-US" sz="1250" dirty="0"/>
           </a:p>
@@ -3021,7 +3021,7 @@
                 <a:ea typeface="Arial" pitchFamily="34" charset="-122"/>
                 <a:cs typeface="Arial" pitchFamily="34" charset="-120"/>
               </a:rPr>
-              <a:t>Hasło zmienia administrator poleceniem — nie ma samoobsługi.</a:t>
+              <a:t>Hasło zmienia administrator poleceniem - nie ma samoobsługi.</a:t>
             </a:r>
             <a:endParaRPr lang="en-US" sz="950" dirty="0"/>
           </a:p>
@@ -3336,7 +3336,7 @@
                 <a:ea typeface="Arial" pitchFamily="34" charset="-122"/>
                 <a:cs typeface="Arial" pitchFamily="34" charset="-120"/>
               </a:rPr>
-              <a:t>Przy bramie port 3100 nie może być wystawiony — nagłówek tożsamości byłby wtedy do podrobienia.</a:t>
+              <a:t>Przy bramie port 3100 nie może być wystawiony - nagłówek tożsamości byłby wtedy do podrobienia.</a:t>
             </a:r>
             <a:endParaRPr lang="en-US" sz="950" dirty="0"/>
           </a:p>
@@ -4361,7 +4361,7 @@
                 <a:ea typeface="Arial" pitchFamily="34" charset="-122"/>
                 <a:cs typeface="Arial" pitchFamily="34" charset="-120"/>
               </a:rPr>
-              <a:t>serwer/dane/ zawiera konta i bazę wiedzy — jedyne dane, których nie odtworzy git.</a:t>
+              <a:t>serwer/dane/ zawiera konta i bazę wiedzy - jedyne dane, których nie odtworzy git.</a:t>
             </a:r>
             <a:endParaRPr lang="en-US" sz="950" dirty="0"/>
           </a:p>
@@ -5208,7 +5208,7 @@
                 <a:ea typeface="Arial" pitchFamily="34" charset="-122"/>
                 <a:cs typeface="Arial" pitchFamily="34" charset="-120"/>
               </a:rPr>
-              <a:t>odcisk przeglądarki — znikał po wyczyszczeniu pamięci</a:t>
+              <a:t>odcisk przeglądarki - znikał po wyczyszczeniu pamięci</a:t>
             </a:r>
             <a:endParaRPr lang="en-US" sz="950" dirty="0"/>
           </a:p>
@@ -6614,7 +6614,7 @@
                 <a:ea typeface="Arial" pitchFamily="34" charset="-122"/>
                 <a:cs typeface="Arial" pitchFamily="34" charset="-120"/>
               </a:rPr>
-              <a:t>Serwer stoi na Twojej maszynie — usługa systemd z ograniczonymi uprawnieniami, zapis tylko do katalogu z kontami</a:t>
+              <a:t>Serwer stoi na Twojej maszynie - usługa systemd z ograniczonymi uprawnieniami, zapis tylko do katalogu z kontami</a:t>
             </a:r>
             <a:endParaRPr lang="en-US" sz="1100" dirty="0"/>
           </a:p>
@@ -8371,7 +8371,7 @@
                 <a:ea typeface="Arial" pitchFamily="34" charset="-122"/>
                 <a:cs typeface="Arial" pitchFamily="34" charset="-120"/>
               </a:rPr>
-              <a:t>nic — aplikacja wysyła żądania do Twojego serwera, ten dokłada klucz</a:t>
+              <a:t>nic - aplikacja wysyła żądania do Twojego serwera, ten dokłada klucz</a:t>
             </a:r>
             <a:endParaRPr lang="en-US" sz="1050" dirty="0"/>
           </a:p>
@@ -8581,7 +8581,7 @@
                 <a:ea typeface="Arial" pitchFamily="34" charset="-122"/>
                 <a:cs typeface="Arial" pitchFamily="34" charset="-120"/>
               </a:rPr>
-              <a:t>endpoint dla admina pokazuje, czy klucz jest ustawiony — nigdy jego treść</a:t>
+              <a:t>endpoint dla admina pokazuje, czy klucz jest ustawiony - nigdy jego treść</a:t>
             </a:r>
             <a:endParaRPr lang="en-US" sz="1050" dirty="0"/>
           </a:p>
@@ -9318,7 +9318,7 @@
                 <a:ea typeface="Arial" pitchFamily="34" charset="-122"/>
                 <a:cs typeface="Arial" pitchFamily="34" charset="-120"/>
               </a:rPr>
-              <a:t>Do promptu trafiają tylko fragmenty pasujące do tematu, nie cała baza — mniej danych opuszcza organizację niż przy wklejaniu całych dokumentów.</a:t>
+              <a:t>Do promptu trafiają tylko fragmenty pasujące do tematu, nie cała baza - mniej danych opuszcza organizację niż przy wklejaniu całych dokumentów.</a:t>
             </a:r>
             <a:endParaRPr lang="en-US" sz="1050" dirty="0"/>
           </a:p>
@@ -9835,7 +9835,7 @@
                 <a:ea typeface="Arial" pitchFamily="34" charset="-122"/>
                 <a:cs typeface="Arial" pitchFamily="34" charset="-120"/>
               </a:rPr>
-              <a:t>Nazwa pliku powstaje z loginu przepuszczonego przez filtr znaków — nie da się wyjść poza katalog</a:t>
+              <a:t>Nazwa pliku powstaje z loginu przepuszczonego przez filtr znaków - nie da się wyjść poza katalog</a:t>
             </a:r>
             <a:endParaRPr lang="en-US" sz="1100" dirty="0"/>
           </a:p>
@@ -10207,7 +10207,7 @@
                 <a:ea typeface="Arial" pitchFamily="34" charset="-122"/>
                 <a:cs typeface="Arial" pitchFamily="34" charset="-120"/>
               </a:rPr>
-              <a:t>wersja kontenerowa OpenSEO startuje bez żadnego logowania — wystawiona wprost daje pełny dostęp każdemu, kto zna adres</a:t>
+              <a:t>wersja kontenerowa OpenSEO startuje bez żadnego logowania - wystawiona wprost daje pełny dostęp każdemu, kto zna adres</a:t>
             </a:r>
             <a:endParaRPr lang="en-US" sz="1050" dirty="0"/>
           </a:p>
